--- a/dist/초3/수학/분수와소수/초3_수학_분수와소수_02_단위분수와크기비교_학생용.pptx
+++ b/dist/초3/수학/분수와소수/초3_수학_분수와소수_02_단위분수와크기비교_학생용.pptx
@@ -118,44 +118,44 @@
   <p:extLst>
     <p:ext uri="{521415D9-36F7-43E2-AB2F-B90AF26B5E84}">
       <p14:sectionLst xmlns:p14="http://schemas.microsoft.com/office/powerpoint/2010/main">
-        <p14:section name="도입" id="{cf126105-ed57-6a68-276d-269825232350}">
+        <p14:section name="도입" id="{232f90e6-d0dc-b651-65d5-1ad234c8a3bb}">
           <p14:sldIdLst>
             <p14:sldId id="256"/>
             <p14:sldId id="257"/>
           </p14:sldIdLst>
         </p14:section>
-        <p14:section name="개념" id="{23413ab0-71b2-3e07-1ed8-48f24671a219}">
+        <p14:section name="개념" id="{0433a6ed-9f64-2c16-2477-bf91b3d1f771}">
           <p14:sldIdLst>
             <p14:sldId id="258"/>
             <p14:sldId id="259"/>
             <p14:sldId id="261"/>
           </p14:sldIdLst>
         </p14:section>
-        <p14:section name="연습" id="{2ff7fc88-3d48-6161-bd95-9ca926fe1c1a}">
+        <p14:section name="연습" id="{c1ec72fb-d8ff-8fe8-c1ec-38481c3b491c}">
           <p14:sldIdLst>
             <p14:sldId id="260"/>
             <p14:sldId id="262"/>
             <p14:sldId id="263"/>
           </p14:sldIdLst>
         </p14:section>
-        <p14:section name="개념" id="{bc5ba6d3-eb0a-2e3d-d4aa-1ca47a6dbb41}">
+        <p14:section name="개념" id="{fb131476-b34c-e6c0-357a-274d9ecad57c}">
           <p14:sldIdLst/>
         </p14:section>
-        <p14:section name="연습" id="{fdaff2c7-d8db-f96a-6322-08e2fbc51ba0}">
+        <p14:section name="연습" id="{ca46922e-eff2-cfd5-77b3-0204bc91758b}">
           <p14:sldIdLst/>
         </p14:section>
-        <p14:section name="확인" id="{e4a2c61f-a185-570a-01bb-b81357852607}">
+        <p14:section name="확인" id="{00edb43a-0911-982d-987e-04957b9f35d1}">
           <p14:sldIdLst>
             <p14:sldId id="264"/>
             <p14:sldId id="265"/>
           </p14:sldIdLst>
         </p14:section>
-        <p14:section name="정리" id="{f93f5a8e-50c6-db49-aa89-c1b810d383cb}">
+        <p14:section name="정리" id="{d44f7464-1e8a-1d1a-e6bb-8d7c78150a2b}">
           <p14:sldIdLst>
             <p14:sldId id="266"/>
           </p14:sldIdLst>
         </p14:section>
-        <p14:section name="보충" id="{793ce03a-9372-f20d-ad80-2091c38d92dd}">
+        <p14:section name="보충" id="{5fe2abbe-9c8c-5f1d-7ca5-89f1b7bf557f}">
           <p14:sldIdLst>
             <p14:sldId id="267"/>
           </p14:sldIdLst>
